--- a/test/read/fixtures/custgeom.pptx
+++ b/test/read/fixtures/custgeom.pptx
@@ -104,6 +104,11 @@
       </a:defRPr>
     </a:lvl9pPr>
   </p:defaultTextStyle>
+  <p:extLst>
+    <p:ext uri="{EFAFB233-063F-42B5-8137-9DF3F51BA10A}">
+      <p15:sldGuideLst xmlns:p15="http://schemas.microsoft.com/office/powerpoint/2012/main"/>
+    </p:ext>
+  </p:extLst>
 </p:presentation>
 </file>
 
@@ -3471,6 +3476,144 @@
           <a:prstGeom prst="rect">
             <a:avLst/>
           </a:prstGeom>
+        </p:spPr>
+        <p:style>
+          <a:lnRef idx="2">
+            <a:schemeClr val="accent1">
+              <a:shade val="15000"/>
+            </a:schemeClr>
+          </a:lnRef>
+          <a:fillRef idx="1">
+            <a:schemeClr val="accent1"/>
+          </a:fillRef>
+          <a:effectRef idx="0">
+            <a:schemeClr val="accent1"/>
+          </a:effectRef>
+          <a:fontRef idx="minor">
+            <a:schemeClr val="lt1"/>
+          </a:fontRef>
+        </p:style>
+        <p:txBody>
+          <a:bodyPr rtlCol="0" anchor="ctr"/>
+          <a:lstStyle/>
+          <a:p>
+            <a:pPr algn="ctr"/>
+            <a:endParaRPr lang="en-US"/>
+          </a:p>
+        </p:txBody>
+      </p:sp>
+      <p:sp>
+        <p:nvSpPr>
+          <p:cNvPr id="7" name="freeform-hole">
+            <a:extLst>
+              <a:ext uri="{FF2B5EF4-FFF2-40B4-BE49-F238E27FC236}">
+                <a16:creationId xmlns:a16="http://schemas.microsoft.com/office/drawing/2014/main" id="{2694A731-2F7B-7965-11CE-AC6EF7FEF0DF}"/>
+              </a:ext>
+            </a:extLst>
+          </p:cNvPr>
+          <p:cNvSpPr/>
+          <p:nvPr/>
+        </p:nvSpPr>
+        <p:spPr>
+          <a:xfrm>
+            <a:off x="1270000" y="4826000"/>
+            <a:ext cx="2540000" cy="1524000"/>
+          </a:xfrm>
+          <a:custGeom>
+            <a:avLst/>
+            <a:gdLst>
+              <a:gd name="csX0" fmla="*/ 1270000 w 2540000"/>
+              <a:gd name="csY0" fmla="*/ 381000 h 1524000"/>
+              <a:gd name="csX1" fmla="*/ 635000 w 2540000"/>
+              <a:gd name="csY1" fmla="*/ 762000 h 1524000"/>
+              <a:gd name="csX2" fmla="*/ 1270000 w 2540000"/>
+              <a:gd name="csY2" fmla="*/ 1143000 h 1524000"/>
+              <a:gd name="csX3" fmla="*/ 1905000 w 2540000"/>
+              <a:gd name="csY3" fmla="*/ 762000 h 1524000"/>
+              <a:gd name="csX4" fmla="*/ 1270000 w 2540000"/>
+              <a:gd name="csY4" fmla="*/ 381000 h 1524000"/>
+              <a:gd name="csX5" fmla="*/ 0 w 2540000"/>
+              <a:gd name="csY5" fmla="*/ 0 h 1524000"/>
+              <a:gd name="csX6" fmla="*/ 2540000 w 2540000"/>
+              <a:gd name="csY6" fmla="*/ 0 h 1524000"/>
+              <a:gd name="csX7" fmla="*/ 2540000 w 2540000"/>
+              <a:gd name="csY7" fmla="*/ 1524000 h 1524000"/>
+              <a:gd name="csX8" fmla="*/ 0 w 2540000"/>
+              <a:gd name="csY8" fmla="*/ 1524000 h 1524000"/>
+            </a:gdLst>
+            <a:ahLst/>
+            <a:cxnLst>
+              <a:cxn ang="0">
+                <a:pos x="csX0" y="csY0"/>
+              </a:cxn>
+              <a:cxn ang="0">
+                <a:pos x="csX1" y="csY1"/>
+              </a:cxn>
+              <a:cxn ang="0">
+                <a:pos x="csX2" y="csY2"/>
+              </a:cxn>
+              <a:cxn ang="0">
+                <a:pos x="csX3" y="csY3"/>
+              </a:cxn>
+              <a:cxn ang="0">
+                <a:pos x="csX4" y="csY4"/>
+              </a:cxn>
+              <a:cxn ang="0">
+                <a:pos x="csX5" y="csY5"/>
+              </a:cxn>
+              <a:cxn ang="0">
+                <a:pos x="csX6" y="csY6"/>
+              </a:cxn>
+              <a:cxn ang="0">
+                <a:pos x="csX7" y="csY7"/>
+              </a:cxn>
+              <a:cxn ang="0">
+                <a:pos x="csX8" y="csY8"/>
+              </a:cxn>
+            </a:cxnLst>
+            <a:rect l="l" t="t" r="r" b="b"/>
+            <a:pathLst>
+              <a:path w="2540000" h="1524000">
+                <a:moveTo>
+                  <a:pt x="1270000" y="381000"/>
+                </a:moveTo>
+                <a:cubicBezTo>
+                  <a:pt x="919299" y="381000"/>
+                  <a:pt x="635000" y="551580"/>
+                  <a:pt x="635000" y="762000"/>
+                </a:cubicBezTo>
+                <a:cubicBezTo>
+                  <a:pt x="635000" y="972420"/>
+                  <a:pt x="919299" y="1143000"/>
+                  <a:pt x="1270000" y="1143000"/>
+                </a:cubicBezTo>
+                <a:cubicBezTo>
+                  <a:pt x="1620701" y="1143000"/>
+                  <a:pt x="1905000" y="972420"/>
+                  <a:pt x="1905000" y="762000"/>
+                </a:cubicBezTo>
+                <a:cubicBezTo>
+                  <a:pt x="1905000" y="551580"/>
+                  <a:pt x="1620701" y="381000"/>
+                  <a:pt x="1270000" y="381000"/>
+                </a:cubicBezTo>
+                <a:close/>
+                <a:moveTo>
+                  <a:pt x="0" y="0"/>
+                </a:moveTo>
+                <a:lnTo>
+                  <a:pt x="2540000" y="0"/>
+                </a:lnTo>
+                <a:lnTo>
+                  <a:pt x="2540000" y="1524000"/>
+                </a:lnTo>
+                <a:lnTo>
+                  <a:pt x="0" y="1524000"/>
+                </a:lnTo>
+                <a:close/>
+              </a:path>
+            </a:pathLst>
+          </a:custGeom>
         </p:spPr>
         <p:style>
           <a:lnRef idx="2">
